--- a/assets/template.pptx
+++ b/assets/template.pptx
@@ -1108,7 +1108,7 @@
         </p:nvSpPr>
         <p:spPr>
           <a:xfrm>
-            <a:off x="27432" y="4818888"/>
+            <a:off x="3035808" y="4818888"/>
             <a:ext cx="3086100" cy="274637"/>
           </a:xfrm>
           <a:prstGeom prst="rect">
